--- a/PPTs/Lecture 3 Exercises.pptx
+++ b/PPTs/Lecture 3 Exercises.pptx
@@ -5,7 +5,7 @@
     <p:sldMasterId id="2147483670" r:id="rId1"/>
   </p:sldMasterIdLst>
   <p:notesMasterIdLst>
-    <p:notesMasterId r:id="rId9"/>
+    <p:notesMasterId r:id="rId11"/>
   </p:notesMasterIdLst>
   <p:sldIdLst>
     <p:sldId id="257" r:id="rId2"/>
@@ -15,38 +15,40 @@
     <p:sldId id="1267" r:id="rId6"/>
     <p:sldId id="1269" r:id="rId7"/>
     <p:sldId id="1272" r:id="rId8"/>
+    <p:sldId id="1274" r:id="rId9"/>
+    <p:sldId id="1276" r:id="rId10"/>
   </p:sldIdLst>
   <p:sldSz cx="9144000" cy="5143500" type="screen16x9"/>
   <p:notesSz cx="6858000" cy="9144000"/>
   <p:embeddedFontLst>
     <p:embeddedFont>
       <p:font typeface="ＭＳ Ｐゴシック" panose="020B0600070205080204" pitchFamily="34" charset="-128"/>
-      <p:regular r:id="rId10"/>
+      <p:regular r:id="rId12"/>
     </p:embeddedFont>
     <p:embeddedFont>
       <p:font typeface="Cambria Math" panose="02040503050406030204" pitchFamily="18" charset="0"/>
-      <p:regular r:id="rId11"/>
+      <p:regular r:id="rId13"/>
     </p:embeddedFont>
     <p:embeddedFont>
       <p:font typeface="Roboto" panose="02000000000000000000" pitchFamily="2" charset="0"/>
-      <p:regular r:id="rId12"/>
-      <p:bold r:id="rId13"/>
-      <p:italic r:id="rId14"/>
-      <p:boldItalic r:id="rId15"/>
+      <p:regular r:id="rId14"/>
+      <p:bold r:id="rId15"/>
+      <p:italic r:id="rId16"/>
+      <p:boldItalic r:id="rId17"/>
     </p:embeddedFont>
     <p:embeddedFont>
       <p:font typeface="Roboto Light" panose="02000000000000000000" pitchFamily="2" charset="0"/>
-      <p:regular r:id="rId16"/>
-      <p:bold r:id="rId17"/>
-      <p:italic r:id="rId18"/>
-      <p:boldItalic r:id="rId19"/>
+      <p:regular r:id="rId18"/>
+      <p:bold r:id="rId19"/>
+      <p:italic r:id="rId20"/>
+      <p:boldItalic r:id="rId21"/>
     </p:embeddedFont>
     <p:embeddedFont>
       <p:font typeface="Roboto Medium" panose="02000000000000000000" pitchFamily="2" charset="0"/>
-      <p:regular r:id="rId20"/>
-      <p:bold r:id="rId21"/>
-      <p:italic r:id="rId22"/>
-      <p:boldItalic r:id="rId23"/>
+      <p:regular r:id="rId22"/>
+      <p:bold r:id="rId23"/>
+      <p:italic r:id="rId24"/>
+      <p:boldItalic r:id="rId25"/>
     </p:embeddedFont>
   </p:embeddedFontLst>
   <p:defaultTextStyle>
@@ -291,43 +293,57 @@
   <pc:docChgLst>
     <pc:chgData name="Zonghua Gu" userId="9a7e1853e1951ef5" providerId="LiveId" clId="{CF1FAA12-072C-4ED5-BA76-0FFFAEFDB88A}"/>
     <pc:docChg chg="delSld">
-      <pc:chgData name="Zonghua Gu" userId="9a7e1853e1951ef5" providerId="LiveId" clId="{CF1FAA12-072C-4ED5-BA76-0FFFAEFDB88A}" dt="2026-01-30T04:44:54.808" v="4" actId="47"/>
+      <pc:chgData name="Zonghua Gu" userId="9a7e1853e1951ef5" providerId="LiveId" clId="{CF1FAA12-072C-4ED5-BA76-0FFFAEFDB88A}" dt="2026-02-01T03:15:03.773" v="6" actId="47"/>
       <pc:docMkLst>
         <pc:docMk/>
       </pc:docMkLst>
       <pc:sldChg chg="del">
-        <pc:chgData name="Zonghua Gu" userId="9a7e1853e1951ef5" providerId="LiveId" clId="{CF1FAA12-072C-4ED5-BA76-0FFFAEFDB88A}" dt="2026-01-30T04:44:51.083" v="1" actId="47"/>
+        <pc:chgData name="Zonghua Gu" userId="9a7e1853e1951ef5" providerId="LiveId" clId="{CF1FAA12-072C-4ED5-BA76-0FFFAEFDB88A}" dt="2026-02-01T03:14:58.507" v="1" actId="47"/>
         <pc:sldMkLst>
           <pc:docMk/>
           <pc:sldMk cId="547263288" sldId="1265"/>
         </pc:sldMkLst>
       </pc:sldChg>
       <pc:sldChg chg="del">
-        <pc:chgData name="Zonghua Gu" userId="9a7e1853e1951ef5" providerId="LiveId" clId="{CF1FAA12-072C-4ED5-BA76-0FFFAEFDB88A}" dt="2026-01-30T04:44:48.443" v="0" actId="47"/>
+        <pc:chgData name="Zonghua Gu" userId="9a7e1853e1951ef5" providerId="LiveId" clId="{CF1FAA12-072C-4ED5-BA76-0FFFAEFDB88A}" dt="2026-02-01T03:14:57.449" v="0" actId="47"/>
         <pc:sldMkLst>
           <pc:docMk/>
           <pc:sldMk cId="1519989677" sldId="1266"/>
         </pc:sldMkLst>
       </pc:sldChg>
       <pc:sldChg chg="del">
-        <pc:chgData name="Zonghua Gu" userId="9a7e1853e1951ef5" providerId="LiveId" clId="{CF1FAA12-072C-4ED5-BA76-0FFFAEFDB88A}" dt="2026-01-30T04:44:52.123" v="2" actId="47"/>
+        <pc:chgData name="Zonghua Gu" userId="9a7e1853e1951ef5" providerId="LiveId" clId="{CF1FAA12-072C-4ED5-BA76-0FFFAEFDB88A}" dt="2026-02-01T03:15:00.065" v="2" actId="47"/>
         <pc:sldMkLst>
           <pc:docMk/>
           <pc:sldMk cId="1696198607" sldId="1268"/>
         </pc:sldMkLst>
       </pc:sldChg>
       <pc:sldChg chg="del">
-        <pc:chgData name="Zonghua Gu" userId="9a7e1853e1951ef5" providerId="LiveId" clId="{CF1FAA12-072C-4ED5-BA76-0FFFAEFDB88A}" dt="2026-01-30T04:44:53.069" v="3" actId="47"/>
+        <pc:chgData name="Zonghua Gu" userId="9a7e1853e1951ef5" providerId="LiveId" clId="{CF1FAA12-072C-4ED5-BA76-0FFFAEFDB88A}" dt="2026-02-01T03:15:00.949" v="3" actId="47"/>
         <pc:sldMkLst>
           <pc:docMk/>
           <pc:sldMk cId="2472874222" sldId="1270"/>
         </pc:sldMkLst>
       </pc:sldChg>
       <pc:sldChg chg="del">
-        <pc:chgData name="Zonghua Gu" userId="9a7e1853e1951ef5" providerId="LiveId" clId="{CF1FAA12-072C-4ED5-BA76-0FFFAEFDB88A}" dt="2026-01-30T04:44:54.808" v="4" actId="47"/>
+        <pc:chgData name="Zonghua Gu" userId="9a7e1853e1951ef5" providerId="LiveId" clId="{CF1FAA12-072C-4ED5-BA76-0FFFAEFDB88A}" dt="2026-02-01T03:15:01.850" v="4" actId="47"/>
         <pc:sldMkLst>
           <pc:docMk/>
           <pc:sldMk cId="2647804915" sldId="1273"/>
+        </pc:sldMkLst>
+      </pc:sldChg>
+      <pc:sldChg chg="del">
+        <pc:chgData name="Zonghua Gu" userId="9a7e1853e1951ef5" providerId="LiveId" clId="{CF1FAA12-072C-4ED5-BA76-0FFFAEFDB88A}" dt="2026-02-01T03:15:02.796" v="5" actId="47"/>
+        <pc:sldMkLst>
+          <pc:docMk/>
+          <pc:sldMk cId="661331575" sldId="1275"/>
+        </pc:sldMkLst>
+      </pc:sldChg>
+      <pc:sldChg chg="del">
+        <pc:chgData name="Zonghua Gu" userId="9a7e1853e1951ef5" providerId="LiveId" clId="{CF1FAA12-072C-4ED5-BA76-0FFFAEFDB88A}" dt="2026-02-01T03:15:03.773" v="6" actId="47"/>
+        <pc:sldMkLst>
+          <pc:docMk/>
+          <pc:sldMk cId="623579125" sldId="1277"/>
         </pc:sldMkLst>
       </pc:sldChg>
     </pc:docChg>
@@ -362,6 +378,110 @@
 </file>
 
 <file path=ppt/ink/ink10.xml><?xml version="1.0" encoding="utf-8"?>
+<inkml:ink xmlns:inkml="http://www.w3.org/2003/InkML">
+  <inkml:definitions>
+    <inkml:context xml:id="ctx0">
+      <inkml:inkSource xml:id="inkSrc0">
+        <inkml:traceFormat>
+          <inkml:channel name="X" type="integer" min="-2.14748E9" max="2.14748E9" units="cm"/>
+          <inkml:channel name="Y" type="integer" min="-2.14748E9" max="2.14748E9" units="cm"/>
+        </inkml:traceFormat>
+        <inkml:channelProperties>
+          <inkml:channelProperty channel="X" name="resolution" value="1000" units="1/cm"/>
+          <inkml:channelProperty channel="Y" name="resolution" value="1000" units="1/cm"/>
+        </inkml:channelProperties>
+      </inkml:inkSource>
+      <inkml:timestamp xml:id="ts0" timeString="2024-10-21T23:16:08.010"/>
+    </inkml:context>
+    <inkml:brush xml:id="br0">
+      <inkml:brushProperty name="width" value="0.05" units="cm"/>
+      <inkml:brushProperty name="height" value="0.05" units="cm"/>
+      <inkml:brushProperty name="ignorePressure" value="1"/>
+    </inkml:brush>
+  </inkml:definitions>
+  <inkml:trace contextRef="#ctx0" brushRef="#br0">0 1,'0'0</inkml:trace>
+</inkml:ink>
+</file>
+
+<file path=ppt/ink/ink11.xml><?xml version="1.0" encoding="utf-8"?>
+<inkml:ink xmlns:inkml="http://www.w3.org/2003/InkML">
+  <inkml:definitions>
+    <inkml:context xml:id="ctx0">
+      <inkml:inkSource xml:id="inkSrc0">
+        <inkml:traceFormat>
+          <inkml:channel name="X" type="integer" min="-2.14748E9" max="2.14748E9" units="cm"/>
+          <inkml:channel name="Y" type="integer" min="-2.14748E9" max="2.14748E9" units="cm"/>
+        </inkml:traceFormat>
+        <inkml:channelProperties>
+          <inkml:channelProperty channel="X" name="resolution" value="1000" units="1/cm"/>
+          <inkml:channelProperty channel="Y" name="resolution" value="1000" units="1/cm"/>
+        </inkml:channelProperties>
+      </inkml:inkSource>
+      <inkml:timestamp xml:id="ts0" timeString="2024-10-21T23:16:07.146"/>
+    </inkml:context>
+    <inkml:brush xml:id="br0">
+      <inkml:brushProperty name="width" value="0.05" units="cm"/>
+      <inkml:brushProperty name="height" value="0.05" units="cm"/>
+      <inkml:brushProperty name="ignorePressure" value="1"/>
+    </inkml:brush>
+  </inkml:definitions>
+  <inkml:trace contextRef="#ctx0" brushRef="#br0">0 0,'0'0</inkml:trace>
+</inkml:ink>
+</file>
+
+<file path=ppt/ink/ink12.xml><?xml version="1.0" encoding="utf-8"?>
+<inkml:ink xmlns:inkml="http://www.w3.org/2003/InkML">
+  <inkml:definitions>
+    <inkml:context xml:id="ctx0">
+      <inkml:inkSource xml:id="inkSrc0">
+        <inkml:traceFormat>
+          <inkml:channel name="X" type="integer" min="-2.14748E9" max="2.14748E9" units="cm"/>
+          <inkml:channel name="Y" type="integer" min="-2.14748E9" max="2.14748E9" units="cm"/>
+        </inkml:traceFormat>
+        <inkml:channelProperties>
+          <inkml:channelProperty channel="X" name="resolution" value="1000" units="1/cm"/>
+          <inkml:channelProperty channel="Y" name="resolution" value="1000" units="1/cm"/>
+        </inkml:channelProperties>
+      </inkml:inkSource>
+      <inkml:timestamp xml:id="ts0" timeString="2024-10-21T23:16:08.010"/>
+    </inkml:context>
+    <inkml:brush xml:id="br0">
+      <inkml:brushProperty name="width" value="0.05" units="cm"/>
+      <inkml:brushProperty name="height" value="0.05" units="cm"/>
+      <inkml:brushProperty name="ignorePressure" value="1"/>
+    </inkml:brush>
+  </inkml:definitions>
+  <inkml:trace contextRef="#ctx0" brushRef="#br0">0 1,'0'0</inkml:trace>
+</inkml:ink>
+</file>
+
+<file path=ppt/ink/ink13.xml><?xml version="1.0" encoding="utf-8"?>
+<inkml:ink xmlns:inkml="http://www.w3.org/2003/InkML">
+  <inkml:definitions>
+    <inkml:context xml:id="ctx0">
+      <inkml:inkSource xml:id="inkSrc0">
+        <inkml:traceFormat>
+          <inkml:channel name="X" type="integer" min="-2.14748E9" max="2.14748E9" units="cm"/>
+          <inkml:channel name="Y" type="integer" min="-2.14748E9" max="2.14748E9" units="cm"/>
+        </inkml:traceFormat>
+        <inkml:channelProperties>
+          <inkml:channelProperty channel="X" name="resolution" value="1000" units="1/cm"/>
+          <inkml:channelProperty channel="Y" name="resolution" value="1000" units="1/cm"/>
+        </inkml:channelProperties>
+      </inkml:inkSource>
+      <inkml:timestamp xml:id="ts0" timeString="2024-10-21T23:16:07.146"/>
+    </inkml:context>
+    <inkml:brush xml:id="br0">
+      <inkml:brushProperty name="width" value="0.05" units="cm"/>
+      <inkml:brushProperty name="height" value="0.05" units="cm"/>
+      <inkml:brushProperty name="ignorePressure" value="1"/>
+    </inkml:brush>
+  </inkml:definitions>
+  <inkml:trace contextRef="#ctx0" brushRef="#br0">0 0,'0'0</inkml:trace>
+</inkml:ink>
+</file>
+
+<file path=ppt/ink/ink14.xml><?xml version="1.0" encoding="utf-8"?>
 <inkml:ink xmlns:inkml="http://www.w3.org/2003/InkML">
   <inkml:definitions>
     <inkml:context xml:id="ctx0">
@@ -7741,10 +7861,6 @@
             </a:lvl1pPr>
           </a:lstStyle>
           <a:p>
-            <a:r>
-              <a:rPr lang="en-US" dirty="0"/>
-              <a:t>Introduction: 1-</a:t>
-            </a:r>
             <a:fld id="{C4204591-24BD-A542-B9D5-F8D8A88D2FEE}" type="slidenum">
               <a:rPr lang="en-US" smtClean="0"/>
               <a:pPr/>
@@ -12931,7 +13047,7 @@
     <p:sldLayoutId id="2147483669" r:id="rId19"/>
     <p:sldLayoutId id="2147483671" r:id="rId20"/>
   </p:sldLayoutIdLst>
-  <p:hf sldNum="0" hdr="0" ftr="0" dt="0"/>
+  <p:hf hdr="0" ftr="0" dt="0"/>
   <p:txStyles>
     <p:titleStyle>
       <a:defPPr marR="0" lvl="0" algn="l" rtl="0">
@@ -13722,30 +13838,7 @@
                 <a:cs typeface="Roboto"/>
                 <a:sym typeface="Roboto"/>
               </a:rPr>
-              <a:t>Bandwidth and</a:t>
-            </a:r>
-            <a:br>
-              <a:rPr lang="en" b="1" dirty="0">
-                <a:solidFill>
-                  <a:schemeClr val="accent3"/>
-                </a:solidFill>
-                <a:latin typeface="Roboto"/>
-                <a:ea typeface="Roboto"/>
-                <a:cs typeface="Roboto"/>
-                <a:sym typeface="Roboto"/>
-              </a:rPr>
-            </a:br>
-            <a:r>
-              <a:rPr lang="en" b="1" dirty="0">
-                <a:solidFill>
-                  <a:schemeClr val="accent3"/>
-                </a:solidFill>
-                <a:latin typeface="Roboto"/>
-                <a:ea typeface="Roboto"/>
-                <a:cs typeface="Roboto"/>
-                <a:sym typeface="Roboto"/>
-              </a:rPr>
-              <a:t>Propagation Delay</a:t>
+              <a:t>Bandwidth and Propagation Delay</a:t>
             </a:r>
             <a:endParaRPr b="1" dirty="0">
               <a:solidFill>
@@ -13815,36 +13908,6 @@
                 <a:cs typeface="Roboto"/>
               </a:rPr>
               <a:t>Overloaded Links</a:t>
-            </a:r>
-            <a:endParaRPr b="1" dirty="0">
-              <a:solidFill>
-                <a:schemeClr val="accent3"/>
-              </a:solidFill>
-              <a:latin typeface="Roboto"/>
-              <a:ea typeface="Roboto"/>
-              <a:cs typeface="Roboto"/>
-            </a:endParaRPr>
-          </a:p>
-          <a:p>
-            <a:pPr marL="0" lvl="0" indent="0" algn="l" rtl="0">
-              <a:spcBef>
-                <a:spcPts val="600"/>
-              </a:spcBef>
-              <a:spcAft>
-                <a:spcPts val="0"/>
-              </a:spcAft>
-              <a:buNone/>
-            </a:pPr>
-            <a:r>
-              <a:rPr lang="en" b="1" dirty="0">
-                <a:solidFill>
-                  <a:schemeClr val="accent3"/>
-                </a:solidFill>
-                <a:latin typeface="Roboto"/>
-                <a:ea typeface="Roboto"/>
-                <a:cs typeface="Roboto"/>
-              </a:rPr>
-              <a:t>Brief Preview of the Semester</a:t>
             </a:r>
             <a:endParaRPr b="1" dirty="0">
               <a:solidFill>
@@ -13953,6 +14016,44 @@
               <a:t>2026</a:t>
             </a:r>
             <a:endParaRPr dirty="0"/>
+          </a:p>
+        </p:txBody>
+      </p:sp>
+      <p:sp>
+        <p:nvSpPr>
+          <p:cNvPr id="3" name="Slide Number Placeholder 2">
+            <a:extLst>
+              <a:ext uri="{FF2B5EF4-FFF2-40B4-BE49-F238E27FC236}">
+                <a16:creationId xmlns:a16="http://schemas.microsoft.com/office/drawing/2014/main" id="{BB1700D9-8E43-5310-ED82-BC6D7108F651}"/>
+              </a:ext>
+            </a:extLst>
+          </p:cNvPr>
+          <p:cNvSpPr>
+            <a:spLocks noGrp="1"/>
+          </p:cNvSpPr>
+          <p:nvPr>
+            <p:ph type="sldNum" idx="12"/>
+          </p:nvPr>
+        </p:nvSpPr>
+        <p:spPr/>
+        <p:txBody>
+          <a:bodyPr/>
+          <a:lstStyle/>
+          <a:p>
+            <a:pPr marL="0" lvl="0" indent="0" algn="r" rtl="0">
+              <a:spcBef>
+                <a:spcPts val="0"/>
+              </a:spcBef>
+              <a:spcAft>
+                <a:spcPts val="0"/>
+              </a:spcAft>
+              <a:buNone/>
+            </a:pPr>
+            <a:fld id="{00000000-1234-1234-1234-123412341234}" type="slidenum">
+              <a:rPr lang="en" smtClean="0"/>
+              <a:t>1</a:t>
+            </a:fld>
+            <a:endParaRPr lang="en"/>
           </a:p>
         </p:txBody>
       </p:sp>
@@ -23157,6 +23258,36 @@
           </a:p>
         </p:txBody>
       </p:sp>
+      <p:sp>
+        <p:nvSpPr>
+          <p:cNvPr id="6" name="Slide Number Placeholder 5">
+            <a:extLst>
+              <a:ext uri="{FF2B5EF4-FFF2-40B4-BE49-F238E27FC236}">
+                <a16:creationId xmlns:a16="http://schemas.microsoft.com/office/drawing/2014/main" id="{2471214F-B1AF-A534-2870-602CE650250E}"/>
+              </a:ext>
+            </a:extLst>
+          </p:cNvPr>
+          <p:cNvSpPr>
+            <a:spLocks noGrp="1"/>
+          </p:cNvSpPr>
+          <p:nvPr>
+            <p:ph type="sldNum" sz="quarter" idx="4"/>
+          </p:nvPr>
+        </p:nvSpPr>
+        <p:spPr/>
+        <p:txBody>
+          <a:bodyPr/>
+          <a:lstStyle/>
+          <a:p>
+            <a:fld id="{C4204591-24BD-A542-B9D5-F8D8A88D2FEE}" type="slidenum">
+              <a:rPr lang="en-US" smtClean="0"/>
+              <a:pPr/>
+              <a:t>2</a:t>
+            </a:fld>
+            <a:endParaRPr lang="en-US" dirty="0"/>
+          </a:p>
+        </p:txBody>
+      </p:sp>
     </p:spTree>
     <p:extLst>
       <p:ext uri="{BB962C8B-B14F-4D97-AF65-F5344CB8AC3E}">
@@ -23516,40 +23647,6 @@
           </a:p>
         </p:txBody>
       </p:sp>
-      <p:sp>
-        <p:nvSpPr>
-          <p:cNvPr id="5" name="Slide Number Placeholder 4">
-            <a:extLst>
-              <a:ext uri="{FF2B5EF4-FFF2-40B4-BE49-F238E27FC236}">
-                <a16:creationId xmlns:a16="http://schemas.microsoft.com/office/drawing/2014/main" id="{1D0B0DF4-D0B4-4369-972D-BE8AFA559C49}"/>
-              </a:ext>
-            </a:extLst>
-          </p:cNvPr>
-          <p:cNvSpPr>
-            <a:spLocks noGrp="1"/>
-          </p:cNvSpPr>
-          <p:nvPr>
-            <p:ph type="sldNum" sz="quarter" idx="4"/>
-          </p:nvPr>
-        </p:nvSpPr>
-        <p:spPr/>
-        <p:txBody>
-          <a:bodyPr/>
-          <a:lstStyle/>
-          <a:p>
-            <a:r>
-              <a:rPr lang="en-US"/>
-              <a:t>Introduction: 1-</a:t>
-            </a:r>
-            <a:fld id="{C4204591-24BD-A542-B9D5-F8D8A88D2FEE}" type="slidenum">
-              <a:rPr lang="en-US" smtClean="0"/>
-              <a:pPr/>
-              <a:t>3</a:t>
-            </a:fld>
-            <a:endParaRPr lang="en-US" dirty="0"/>
-          </a:p>
-        </p:txBody>
-      </p:sp>
       <p:pic>
         <p:nvPicPr>
           <p:cNvPr id="6" name="Picture 5">
@@ -23580,6 +23677,36 @@
           </a:prstGeom>
         </p:spPr>
       </p:pic>
+      <p:sp>
+        <p:nvSpPr>
+          <p:cNvPr id="4" name="Slide Number Placeholder 3">
+            <a:extLst>
+              <a:ext uri="{FF2B5EF4-FFF2-40B4-BE49-F238E27FC236}">
+                <a16:creationId xmlns:a16="http://schemas.microsoft.com/office/drawing/2014/main" id="{28DDB450-B6B5-ADD8-C4AB-80B6F0A2A8EE}"/>
+              </a:ext>
+            </a:extLst>
+          </p:cNvPr>
+          <p:cNvSpPr>
+            <a:spLocks noGrp="1"/>
+          </p:cNvSpPr>
+          <p:nvPr>
+            <p:ph type="sldNum" sz="quarter" idx="4"/>
+          </p:nvPr>
+        </p:nvSpPr>
+        <p:spPr/>
+        <p:txBody>
+          <a:bodyPr/>
+          <a:lstStyle/>
+          <a:p>
+            <a:fld id="{C4204591-24BD-A542-B9D5-F8D8A88D2FEE}" type="slidenum">
+              <a:rPr lang="en-US" smtClean="0"/>
+              <a:pPr/>
+              <a:t>3</a:t>
+            </a:fld>
+            <a:endParaRPr lang="en-US" dirty="0"/>
+          </a:p>
+        </p:txBody>
+      </p:sp>
     </p:spTree>
     <p:extLst>
       <p:ext uri="{BB962C8B-B14F-4D97-AF65-F5344CB8AC3E}">
@@ -23973,6 +24100,36 @@
           </a:prstGeom>
         </p:spPr>
       </p:pic>
+      <p:sp>
+        <p:nvSpPr>
+          <p:cNvPr id="5" name="Slide Number Placeholder 4">
+            <a:extLst>
+              <a:ext uri="{FF2B5EF4-FFF2-40B4-BE49-F238E27FC236}">
+                <a16:creationId xmlns:a16="http://schemas.microsoft.com/office/drawing/2014/main" id="{93C2361B-509F-0249-1C38-4A72D018ED31}"/>
+              </a:ext>
+            </a:extLst>
+          </p:cNvPr>
+          <p:cNvSpPr>
+            <a:spLocks noGrp="1"/>
+          </p:cNvSpPr>
+          <p:nvPr>
+            <p:ph type="sldNum" sz="quarter" idx="4"/>
+          </p:nvPr>
+        </p:nvSpPr>
+        <p:spPr/>
+        <p:txBody>
+          <a:bodyPr/>
+          <a:lstStyle/>
+          <a:p>
+            <a:fld id="{C4204591-24BD-A542-B9D5-F8D8A88D2FEE}" type="slidenum">
+              <a:rPr lang="en-US" smtClean="0"/>
+              <a:pPr/>
+              <a:t>4</a:t>
+            </a:fld>
+            <a:endParaRPr lang="en-US" dirty="0"/>
+          </a:p>
+        </p:txBody>
+      </p:sp>
     </p:spTree>
     <p:extLst>
       <p:ext uri="{BB962C8B-B14F-4D97-AF65-F5344CB8AC3E}">
@@ -24326,6 +24483,36 @@
           </a:p>
         </p:txBody>
       </p:sp>
+      <p:sp>
+        <p:nvSpPr>
+          <p:cNvPr id="5" name="Slide Number Placeholder 4">
+            <a:extLst>
+              <a:ext uri="{FF2B5EF4-FFF2-40B4-BE49-F238E27FC236}">
+                <a16:creationId xmlns:a16="http://schemas.microsoft.com/office/drawing/2014/main" id="{0FEDD5B0-BCC5-0862-4680-0C8B4874BDF3}"/>
+              </a:ext>
+            </a:extLst>
+          </p:cNvPr>
+          <p:cNvSpPr>
+            <a:spLocks noGrp="1"/>
+          </p:cNvSpPr>
+          <p:nvPr>
+            <p:ph type="sldNum" sz="quarter" idx="4"/>
+          </p:nvPr>
+        </p:nvSpPr>
+        <p:spPr/>
+        <p:txBody>
+          <a:bodyPr/>
+          <a:lstStyle/>
+          <a:p>
+            <a:fld id="{C4204591-24BD-A542-B9D5-F8D8A88D2FEE}" type="slidenum">
+              <a:rPr lang="en-US" smtClean="0"/>
+              <a:pPr/>
+              <a:t>5</a:t>
+            </a:fld>
+            <a:endParaRPr lang="en-US" dirty="0"/>
+          </a:p>
+        </p:txBody>
+      </p:sp>
     </p:spTree>
     <p:extLst>
       <p:ext uri="{BB962C8B-B14F-4D97-AF65-F5344CB8AC3E}">
@@ -24668,6 +24855,36 @@
           <a:lstStyle/>
           <a:p>
             <a:endParaRPr lang="en-US" sz="1050"/>
+          </a:p>
+        </p:txBody>
+      </p:sp>
+      <p:sp>
+        <p:nvSpPr>
+          <p:cNvPr id="5" name="Slide Number Placeholder 4">
+            <a:extLst>
+              <a:ext uri="{FF2B5EF4-FFF2-40B4-BE49-F238E27FC236}">
+                <a16:creationId xmlns:a16="http://schemas.microsoft.com/office/drawing/2014/main" id="{18E420C5-DA48-DC21-0C91-103F706D88A1}"/>
+              </a:ext>
+            </a:extLst>
+          </p:cNvPr>
+          <p:cNvSpPr>
+            <a:spLocks noGrp="1"/>
+          </p:cNvSpPr>
+          <p:nvPr>
+            <p:ph type="sldNum" sz="quarter" idx="4"/>
+          </p:nvPr>
+        </p:nvSpPr>
+        <p:spPr/>
+        <p:txBody>
+          <a:bodyPr/>
+          <a:lstStyle/>
+          <a:p>
+            <a:fld id="{C4204591-24BD-A542-B9D5-F8D8A88D2FEE}" type="slidenum">
+              <a:rPr lang="en-US" smtClean="0"/>
+              <a:pPr/>
+              <a:t>6</a:t>
+            </a:fld>
+            <a:endParaRPr lang="en-US" dirty="0"/>
           </a:p>
         </p:txBody>
       </p:sp>
@@ -25137,10 +25354,750 @@
           </a:p>
         </p:txBody>
       </p:sp>
+      <p:sp>
+        <p:nvSpPr>
+          <p:cNvPr id="5" name="Slide Number Placeholder 4">
+            <a:extLst>
+              <a:ext uri="{FF2B5EF4-FFF2-40B4-BE49-F238E27FC236}">
+                <a16:creationId xmlns:a16="http://schemas.microsoft.com/office/drawing/2014/main" id="{087023DE-858E-CE3A-6BD3-A38639D9D6C7}"/>
+              </a:ext>
+            </a:extLst>
+          </p:cNvPr>
+          <p:cNvSpPr>
+            <a:spLocks noGrp="1"/>
+          </p:cNvSpPr>
+          <p:nvPr>
+            <p:ph type="sldNum" sz="quarter" idx="4"/>
+          </p:nvPr>
+        </p:nvSpPr>
+        <p:spPr/>
+        <p:txBody>
+          <a:bodyPr/>
+          <a:lstStyle/>
+          <a:p>
+            <a:fld id="{C4204591-24BD-A542-B9D5-F8D8A88D2FEE}" type="slidenum">
+              <a:rPr lang="en-US" smtClean="0"/>
+              <a:pPr/>
+              <a:t>7</a:t>
+            </a:fld>
+            <a:endParaRPr lang="en-US" dirty="0"/>
+          </a:p>
+        </p:txBody>
+      </p:sp>
     </p:spTree>
     <p:extLst>
       <p:ext uri="{BB962C8B-B14F-4D97-AF65-F5344CB8AC3E}">
         <p14:creationId xmlns:p14="http://schemas.microsoft.com/office/powerpoint/2010/main" val="2247612272"/>
+      </p:ext>
+    </p:extLst>
+  </p:cSld>
+  <p:clrMapOvr>
+    <a:masterClrMapping/>
+  </p:clrMapOvr>
+</p:sld>
+</file>
+
+<file path=ppt/slides/slide8.xml><?xml version="1.0" encoding="utf-8"?>
+<p:sld xmlns:a="http://schemas.openxmlformats.org/drawingml/2006/main" xmlns:r="http://schemas.openxmlformats.org/officeDocument/2006/relationships" xmlns:p="http://schemas.openxmlformats.org/presentationml/2006/main">
+  <p:cSld>
+    <p:spTree>
+      <p:nvGrpSpPr>
+        <p:cNvPr id="1" name="">
+          <a:extLst>
+            <a:ext uri="{FF2B5EF4-FFF2-40B4-BE49-F238E27FC236}">
+              <a16:creationId xmlns:a16="http://schemas.microsoft.com/office/drawing/2014/main" id="{7BC34941-33F7-CED5-B96B-7F80E232959C}"/>
+            </a:ext>
+          </a:extLst>
+        </p:cNvPr>
+        <p:cNvGrpSpPr/>
+        <p:nvPr/>
+      </p:nvGrpSpPr>
+      <p:grpSpPr>
+        <a:xfrm>
+          <a:off x="0" y="0"/>
+          <a:ext cx="0" cy="0"/>
+          <a:chOff x="0" y="0"/>
+          <a:chExt cx="0" cy="0"/>
+        </a:xfrm>
+      </p:grpSpPr>
+      <p:sp>
+        <p:nvSpPr>
+          <p:cNvPr id="2" name="Title 1">
+            <a:extLst>
+              <a:ext uri="{FF2B5EF4-FFF2-40B4-BE49-F238E27FC236}">
+                <a16:creationId xmlns:a16="http://schemas.microsoft.com/office/drawing/2014/main" id="{A32FC9C6-5635-D4CB-5A42-F596F5C4907C}"/>
+              </a:ext>
+            </a:extLst>
+          </p:cNvPr>
+          <p:cNvSpPr>
+            <a:spLocks noGrp="1"/>
+          </p:cNvSpPr>
+          <p:nvPr>
+            <p:ph type="title"/>
+          </p:nvPr>
+        </p:nvSpPr>
+        <p:spPr>
+          <a:xfrm>
+            <a:off x="505326" y="338866"/>
+            <a:ext cx="4247148" cy="670967"/>
+          </a:xfrm>
+        </p:spPr>
+        <p:txBody>
+          <a:bodyPr>
+            <a:normAutofit fontScale="90000"/>
+          </a:bodyPr>
+          <a:lstStyle/>
+          <a:p>
+            <a:r>
+              <a:rPr lang="en-US" dirty="0"/>
+              <a:t>Q5.1 Pipe Diagram</a:t>
+            </a:r>
+          </a:p>
+        </p:txBody>
+      </p:sp>
+      <p:sp>
+        <p:nvSpPr>
+          <p:cNvPr id="3" name="Content Placeholder 2">
+            <a:extLst>
+              <a:ext uri="{FF2B5EF4-FFF2-40B4-BE49-F238E27FC236}">
+                <a16:creationId xmlns:a16="http://schemas.microsoft.com/office/drawing/2014/main" id="{08B1A53D-BE96-9908-6EB6-D5CF7B0E825C}"/>
+              </a:ext>
+            </a:extLst>
+          </p:cNvPr>
+          <p:cNvSpPr>
+            <a:spLocks noGrp="1"/>
+          </p:cNvSpPr>
+          <p:nvPr>
+            <p:ph sz="half" idx="1"/>
+          </p:nvPr>
+        </p:nvSpPr>
+        <p:spPr>
+          <a:xfrm>
+            <a:off x="91820" y="1009834"/>
+            <a:ext cx="8724376" cy="4027992"/>
+          </a:xfrm>
+        </p:spPr>
+        <p:txBody>
+          <a:bodyPr>
+            <a:normAutofit/>
+          </a:bodyPr>
+          <a:lstStyle/>
+          <a:p>
+            <a:r>
+              <a:rPr lang="en-US" sz="1600" dirty="0"/>
+              <a:t>Consider the pipe diagram, with a single packet in the pipe.</a:t>
+            </a:r>
+          </a:p>
+          <a:p>
+            <a:r>
+              <a:rPr lang="en-US" sz="1600" dirty="0"/>
+              <a:t>1) What is the size of this packet?</a:t>
+            </a:r>
+          </a:p>
+          <a:p>
+            <a:r>
+              <a:rPr lang="en-US" sz="1600" dirty="0"/>
+              <a:t>2) How long does it take to send a packet of the same size as the packet shown?(Count from the time the first byte is sent, to the time the last byte is received.)</a:t>
+            </a:r>
+          </a:p>
+          <a:p>
+            <a:r>
+              <a:rPr lang="en-US" sz="1600" dirty="0"/>
+              <a:t>3) How long does it take to send 7 packets, all of the same size as the packet shown?(Count from the time the first byte of the first packet is sent, to the time the last byte of the last packet is received.)</a:t>
+            </a:r>
+          </a:p>
+          <a:p>
+            <a:r>
+              <a:rPr lang="en-US" sz="1600" dirty="0"/>
+              <a:t>4) What is the maximum number of packets that could be in the process of being sent </a:t>
+            </a:r>
+            <a:r>
+              <a:rPr lang="en-US" sz="1600" dirty="0" err="1"/>
+              <a:t>alongthis</a:t>
+            </a:r>
+            <a:r>
+              <a:rPr lang="en-US" sz="1600" dirty="0"/>
+              <a:t> link, at any given </a:t>
+            </a:r>
+            <a:r>
+              <a:rPr lang="en-US" sz="1600" dirty="0" err="1"/>
+              <a:t>moment?Don’t</a:t>
+            </a:r>
+            <a:r>
+              <a:rPr lang="en-US" sz="1600" dirty="0"/>
+              <a:t> worry about fractions and rounding (e.g. assume 𝑥, 𝑦, and 𝑧 are defined such that all </a:t>
+            </a:r>
+            <a:r>
+              <a:rPr lang="en-US" sz="1600" dirty="0" err="1"/>
+              <a:t>answerchoices</a:t>
+            </a:r>
+            <a:r>
+              <a:rPr lang="en-US" sz="1600" dirty="0"/>
+              <a:t> are integers).</a:t>
+            </a:r>
+          </a:p>
+          <a:p>
+            <a:endParaRPr lang="en-US" sz="1600" dirty="0"/>
+          </a:p>
+        </p:txBody>
+      </p:sp>
+      <mc:AlternateContent xmlns:mc="http://schemas.openxmlformats.org/markup-compatibility/2006" xmlns:p14="http://schemas.microsoft.com/office/powerpoint/2010/main">
+        <mc:Choice Requires="p14">
+          <p:contentPart p14:bwMode="auto" r:id="rId2">
+            <p14:nvContentPartPr>
+              <p14:cNvPr id="8" name="Ink 7">
+                <a:extLst>
+                  <a:ext uri="{FF2B5EF4-FFF2-40B4-BE49-F238E27FC236}">
+                    <a16:creationId xmlns:a16="http://schemas.microsoft.com/office/drawing/2014/main" id="{20582250-1FE1-A030-8F53-A1DD6C1DFDAD}"/>
+                  </a:ext>
+                </a:extLst>
+              </p14:cNvPr>
+              <p14:cNvContentPartPr/>
+              <p14:nvPr/>
+            </p14:nvContentPartPr>
+            <p14:xfrm>
+              <a:off x="2394024" y="1900753"/>
+              <a:ext cx="270" cy="270"/>
+            </p14:xfrm>
+          </p:contentPart>
+        </mc:Choice>
+        <mc:Fallback xmlns="">
+          <p:pic>
+            <p:nvPicPr>
+              <p:cNvPr id="8" name="Ink 7">
+                <a:extLst>
+                  <a:ext uri="{FF2B5EF4-FFF2-40B4-BE49-F238E27FC236}">
+                    <a16:creationId xmlns:a16="http://schemas.microsoft.com/office/drawing/2014/main" id="{BF9B16F1-26FB-0E56-FA0A-E1AE729E92E6}"/>
+                  </a:ext>
+                </a:extLst>
+              </p:cNvPr>
+              <p:cNvPicPr/>
+              <p:nvPr/>
+            </p:nvPicPr>
+            <p:blipFill>
+              <a:blip r:embed="rId4"/>
+              <a:stretch>
+                <a:fillRect/>
+              </a:stretch>
+            </p:blipFill>
+            <p:spPr>
+              <a:xfrm>
+                <a:off x="2387274" y="1894003"/>
+                <a:ext cx="13500" cy="13500"/>
+              </a:xfrm>
+              <a:prstGeom prst="rect">
+                <a:avLst/>
+              </a:prstGeom>
+            </p:spPr>
+          </p:pic>
+        </mc:Fallback>
+      </mc:AlternateContent>
+      <mc:AlternateContent xmlns:mc="http://schemas.openxmlformats.org/markup-compatibility/2006" xmlns:p14="http://schemas.microsoft.com/office/powerpoint/2010/main">
+        <mc:Choice Requires="p14">
+          <p:contentPart p14:bwMode="auto" r:id="rId5">
+            <p14:nvContentPartPr>
+              <p14:cNvPr id="9" name="Ink 8">
+                <a:extLst>
+                  <a:ext uri="{FF2B5EF4-FFF2-40B4-BE49-F238E27FC236}">
+                    <a16:creationId xmlns:a16="http://schemas.microsoft.com/office/drawing/2014/main" id="{2CA5184B-A4D6-E349-D4DA-85B4DAB3B93E}"/>
+                  </a:ext>
+                </a:extLst>
+              </p14:cNvPr>
+              <p14:cNvContentPartPr/>
+              <p14:nvPr/>
+            </p14:nvContentPartPr>
+            <p14:xfrm>
+              <a:off x="1142574" y="1551373"/>
+              <a:ext cx="270" cy="270"/>
+            </p14:xfrm>
+          </p:contentPart>
+        </mc:Choice>
+        <mc:Fallback xmlns="">
+          <p:pic>
+            <p:nvPicPr>
+              <p:cNvPr id="9" name="Ink 8">
+                <a:extLst>
+                  <a:ext uri="{FF2B5EF4-FFF2-40B4-BE49-F238E27FC236}">
+                    <a16:creationId xmlns:a16="http://schemas.microsoft.com/office/drawing/2014/main" id="{BC90F249-0F8D-8A72-C826-5B5928532520}"/>
+                  </a:ext>
+                </a:extLst>
+              </p:cNvPr>
+              <p:cNvPicPr/>
+              <p:nvPr/>
+            </p:nvPicPr>
+            <p:blipFill>
+              <a:blip r:embed="rId4"/>
+              <a:stretch>
+                <a:fillRect/>
+              </a:stretch>
+            </p:blipFill>
+            <p:spPr>
+              <a:xfrm>
+                <a:off x="1135824" y="1544623"/>
+                <a:ext cx="13500" cy="13500"/>
+              </a:xfrm>
+              <a:prstGeom prst="rect">
+                <a:avLst/>
+              </a:prstGeom>
+            </p:spPr>
+          </p:pic>
+        </mc:Fallback>
+      </mc:AlternateContent>
+      <p:sp>
+        <p:nvSpPr>
+          <p:cNvPr id="12" name="AutoShape 4">
+            <a:extLst>
+              <a:ext uri="{FF2B5EF4-FFF2-40B4-BE49-F238E27FC236}">
+                <a16:creationId xmlns:a16="http://schemas.microsoft.com/office/drawing/2014/main" id="{E2CA02C3-E449-5C3E-4965-31666DC88D64}"/>
+              </a:ext>
+            </a:extLst>
+          </p:cNvPr>
+          <p:cNvSpPr>
+            <a:spLocks noChangeAspect="1" noChangeArrowheads="1"/>
+          </p:cNvSpPr>
+          <p:nvPr/>
+        </p:nvSpPr>
+        <p:spPr bwMode="auto">
+          <a:xfrm>
+            <a:off x="3239691" y="1325166"/>
+            <a:ext cx="2664619" cy="2493169"/>
+          </a:xfrm>
+          <a:prstGeom prst="rect">
+            <a:avLst/>
+          </a:prstGeom>
+          <a:noFill/>
+          <a:extLst>
+            <a:ext uri="{909E8E84-426E-40DD-AFC4-6F175D3DCCD1}">
+              <a14:hiddenFill xmlns:a14="http://schemas.microsoft.com/office/drawing/2010/main">
+                <a:solidFill>
+                  <a:srgbClr val="FFFFFF"/>
+                </a:solidFill>
+              </a14:hiddenFill>
+            </a:ext>
+          </a:extLst>
+        </p:spPr>
+        <p:txBody>
+          <a:bodyPr vert="horz" wrap="square" lIns="68580" tIns="34290" rIns="68580" bIns="34290" numCol="1" anchor="t" anchorCtr="0" compatLnSpc="1">
+            <a:prstTxWarp prst="textNoShape">
+              <a:avLst/>
+            </a:prstTxWarp>
+          </a:bodyPr>
+          <a:lstStyle/>
+          <a:p>
+            <a:endParaRPr lang="en-US" sz="1050"/>
+          </a:p>
+        </p:txBody>
+      </p:sp>
+      <p:pic>
+        <p:nvPicPr>
+          <p:cNvPr id="5" name="Picture 4">
+            <a:extLst>
+              <a:ext uri="{FF2B5EF4-FFF2-40B4-BE49-F238E27FC236}">
+                <a16:creationId xmlns:a16="http://schemas.microsoft.com/office/drawing/2014/main" id="{DD8101C4-61B5-B86D-2A93-BCAF5BD00D59}"/>
+              </a:ext>
+            </a:extLst>
+          </p:cNvPr>
+          <p:cNvPicPr>
+            <a:picLocks noChangeAspect="1"/>
+          </p:cNvPicPr>
+          <p:nvPr/>
+        </p:nvPicPr>
+        <p:blipFill>
+          <a:blip r:embed="rId6"/>
+          <a:stretch>
+            <a:fillRect/>
+          </a:stretch>
+        </p:blipFill>
+        <p:spPr>
+          <a:xfrm>
+            <a:off x="5597871" y="13171"/>
+            <a:ext cx="3454309" cy="1677994"/>
+          </a:xfrm>
+          <a:prstGeom prst="rect">
+            <a:avLst/>
+          </a:prstGeom>
+        </p:spPr>
+      </p:pic>
+      <p:sp>
+        <p:nvSpPr>
+          <p:cNvPr id="7" name="Slide Number Placeholder 6">
+            <a:extLst>
+              <a:ext uri="{FF2B5EF4-FFF2-40B4-BE49-F238E27FC236}">
+                <a16:creationId xmlns:a16="http://schemas.microsoft.com/office/drawing/2014/main" id="{68321D6F-7DBC-A0D3-6A41-32ADD56AE932}"/>
+              </a:ext>
+            </a:extLst>
+          </p:cNvPr>
+          <p:cNvSpPr>
+            <a:spLocks noGrp="1"/>
+          </p:cNvSpPr>
+          <p:nvPr>
+            <p:ph type="sldNum" sz="quarter" idx="4"/>
+          </p:nvPr>
+        </p:nvSpPr>
+        <p:spPr/>
+        <p:txBody>
+          <a:bodyPr/>
+          <a:lstStyle/>
+          <a:p>
+            <a:fld id="{C4204591-24BD-A542-B9D5-F8D8A88D2FEE}" type="slidenum">
+              <a:rPr lang="en-US" smtClean="0"/>
+              <a:pPr/>
+              <a:t>8</a:t>
+            </a:fld>
+            <a:endParaRPr lang="en-US" dirty="0"/>
+          </a:p>
+        </p:txBody>
+      </p:sp>
+    </p:spTree>
+    <p:extLst>
+      <p:ext uri="{BB962C8B-B14F-4D97-AF65-F5344CB8AC3E}">
+        <p14:creationId xmlns:p14="http://schemas.microsoft.com/office/powerpoint/2010/main" val="4059797061"/>
+      </p:ext>
+    </p:extLst>
+  </p:cSld>
+  <p:clrMapOvr>
+    <a:masterClrMapping/>
+  </p:clrMapOvr>
+</p:sld>
+</file>
+
+<file path=ppt/slides/slide9.xml><?xml version="1.0" encoding="utf-8"?>
+<p:sld xmlns:a="http://schemas.openxmlformats.org/drawingml/2006/main" xmlns:r="http://schemas.openxmlformats.org/officeDocument/2006/relationships" xmlns:p="http://schemas.openxmlformats.org/presentationml/2006/main">
+  <p:cSld>
+    <p:spTree>
+      <p:nvGrpSpPr>
+        <p:cNvPr id="1" name="">
+          <a:extLst>
+            <a:ext uri="{FF2B5EF4-FFF2-40B4-BE49-F238E27FC236}">
+              <a16:creationId xmlns:a16="http://schemas.microsoft.com/office/drawing/2014/main" id="{4A6FC1CA-B981-28A8-2E05-9BA2F35B3C3D}"/>
+            </a:ext>
+          </a:extLst>
+        </p:cNvPr>
+        <p:cNvGrpSpPr/>
+        <p:nvPr/>
+      </p:nvGrpSpPr>
+      <p:grpSpPr>
+        <a:xfrm>
+          <a:off x="0" y="0"/>
+          <a:ext cx="0" cy="0"/>
+          <a:chOff x="0" y="0"/>
+          <a:chExt cx="0" cy="0"/>
+        </a:xfrm>
+      </p:grpSpPr>
+      <p:sp>
+        <p:nvSpPr>
+          <p:cNvPr id="2" name="Title 1">
+            <a:extLst>
+              <a:ext uri="{FF2B5EF4-FFF2-40B4-BE49-F238E27FC236}">
+                <a16:creationId xmlns:a16="http://schemas.microsoft.com/office/drawing/2014/main" id="{21CF0434-D174-6BE2-1629-31C6E6E7EF45}"/>
+              </a:ext>
+            </a:extLst>
+          </p:cNvPr>
+          <p:cNvSpPr>
+            <a:spLocks noGrp="1"/>
+          </p:cNvSpPr>
+          <p:nvPr>
+            <p:ph type="title"/>
+          </p:nvPr>
+        </p:nvSpPr>
+        <p:spPr>
+          <a:xfrm>
+            <a:off x="505326" y="338866"/>
+            <a:ext cx="4247148" cy="670967"/>
+          </a:xfrm>
+        </p:spPr>
+        <p:txBody>
+          <a:bodyPr>
+            <a:normAutofit fontScale="90000"/>
+          </a:bodyPr>
+          <a:lstStyle/>
+          <a:p>
+            <a:r>
+              <a:rPr lang="en-US" dirty="0"/>
+              <a:t>Q5.2 Pipe Diagram</a:t>
+            </a:r>
+          </a:p>
+        </p:txBody>
+      </p:sp>
+      <p:sp>
+        <p:nvSpPr>
+          <p:cNvPr id="3" name="Content Placeholder 2">
+            <a:extLst>
+              <a:ext uri="{FF2B5EF4-FFF2-40B4-BE49-F238E27FC236}">
+                <a16:creationId xmlns:a16="http://schemas.microsoft.com/office/drawing/2014/main" id="{074BA215-8363-02BC-EBDF-A16B8D17B68B}"/>
+              </a:ext>
+            </a:extLst>
+          </p:cNvPr>
+          <p:cNvSpPr>
+            <a:spLocks noGrp="1"/>
+          </p:cNvSpPr>
+          <p:nvPr>
+            <p:ph sz="half" idx="1"/>
+          </p:nvPr>
+        </p:nvSpPr>
+        <p:spPr>
+          <a:xfrm>
+            <a:off x="91820" y="1325166"/>
+            <a:ext cx="8724376" cy="3818334"/>
+          </a:xfrm>
+        </p:spPr>
+        <p:txBody>
+          <a:bodyPr>
+            <a:normAutofit fontScale="85000" lnSpcReduction="20000"/>
+          </a:bodyPr>
+          <a:lstStyle/>
+          <a:p>
+            <a:r>
+              <a:rPr lang="en-US" sz="1600" dirty="0"/>
+              <a:t>Now, consider the network topology with a Router R1, which has an infinite-size queue, and R1 continually processes packets in its queue in FIFO order. R1 can only start transmitting a packet once it has received the entire packet. All packets are the same size as the packet shown in the diagram in Q5.1. A wants to send a packet to B. No other packets are being sent along the links (i.e. suppose the packet in the diagram is not there).In the next two subparts, select how long it takes to send the packet from A to B. Count from the time the first byte of the packet is sent at A, to the time the last byte of the packet is received at B.</a:t>
+            </a:r>
+          </a:p>
+          <a:p>
+            <a:r>
+              <a:rPr lang="en-US" sz="1600" dirty="0"/>
+              <a:t>5) In this subpart, suppose R1 has 1 other packet in its queue when A sends the packet. How long does it take to send a single packet from A to B?</a:t>
+            </a:r>
+          </a:p>
+          <a:p>
+            <a:r>
+              <a:rPr lang="en-US" sz="1600" dirty="0"/>
+              <a:t>6) In this subpart, suppose R1 has 20 other packets in its queue when A sends the packet. How long does it take to send a single packet from A to B? Assume that the queue at R1 is </a:t>
+            </a:r>
+            <a:r>
+              <a:rPr lang="en-US" sz="1600" dirty="0" err="1"/>
+              <a:t>notempty</a:t>
+            </a:r>
+            <a:r>
+              <a:rPr lang="en-US" sz="1600" dirty="0"/>
+              <a:t> when this packet arrives at R1.</a:t>
+            </a:r>
+          </a:p>
+          <a:p>
+            <a:r>
+              <a:rPr lang="en-US" sz="1600" dirty="0"/>
+              <a:t>7) What is the maximum number of packets that can be queued at R1, such that when </a:t>
+            </a:r>
+            <a:r>
+              <a:rPr lang="en-US" sz="1600" dirty="0" err="1"/>
+              <a:t>thelast</a:t>
+            </a:r>
+            <a:r>
+              <a:rPr lang="en-US" sz="1600" dirty="0"/>
+              <a:t> byte of the A-to-B packet reaches R1, there is no queue at R1? Don’t worry about fractions and rounding (e.g. assume 𝑥, 𝑦, and 𝑧 are defined such that all results of division are integers.)</a:t>
+            </a:r>
+          </a:p>
+        </p:txBody>
+      </p:sp>
+      <mc:AlternateContent xmlns:mc="http://schemas.openxmlformats.org/markup-compatibility/2006" xmlns:p14="http://schemas.microsoft.com/office/powerpoint/2010/main">
+        <mc:Choice Requires="p14">
+          <p:contentPart p14:bwMode="auto" r:id="rId2">
+            <p14:nvContentPartPr>
+              <p14:cNvPr id="8" name="Ink 7">
+                <a:extLst>
+                  <a:ext uri="{FF2B5EF4-FFF2-40B4-BE49-F238E27FC236}">
+                    <a16:creationId xmlns:a16="http://schemas.microsoft.com/office/drawing/2014/main" id="{ADF47A1A-67F9-FA82-2128-14A0A3324D20}"/>
+                  </a:ext>
+                </a:extLst>
+              </p14:cNvPr>
+              <p14:cNvContentPartPr/>
+              <p14:nvPr/>
+            </p14:nvContentPartPr>
+            <p14:xfrm>
+              <a:off x="2394024" y="1900753"/>
+              <a:ext cx="270" cy="270"/>
+            </p14:xfrm>
+          </p:contentPart>
+        </mc:Choice>
+        <mc:Fallback xmlns="">
+          <p:pic>
+            <p:nvPicPr>
+              <p:cNvPr id="8" name="Ink 7">
+                <a:extLst>
+                  <a:ext uri="{FF2B5EF4-FFF2-40B4-BE49-F238E27FC236}">
+                    <a16:creationId xmlns:a16="http://schemas.microsoft.com/office/drawing/2014/main" id="{BF9B16F1-26FB-0E56-FA0A-E1AE729E92E6}"/>
+                  </a:ext>
+                </a:extLst>
+              </p:cNvPr>
+              <p:cNvPicPr/>
+              <p:nvPr/>
+            </p:nvPicPr>
+            <p:blipFill>
+              <a:blip r:embed="rId4"/>
+              <a:stretch>
+                <a:fillRect/>
+              </a:stretch>
+            </p:blipFill>
+            <p:spPr>
+              <a:xfrm>
+                <a:off x="2387274" y="1894003"/>
+                <a:ext cx="13500" cy="13500"/>
+              </a:xfrm>
+              <a:prstGeom prst="rect">
+                <a:avLst/>
+              </a:prstGeom>
+            </p:spPr>
+          </p:pic>
+        </mc:Fallback>
+      </mc:AlternateContent>
+      <mc:AlternateContent xmlns:mc="http://schemas.openxmlformats.org/markup-compatibility/2006" xmlns:p14="http://schemas.microsoft.com/office/powerpoint/2010/main">
+        <mc:Choice Requires="p14">
+          <p:contentPart p14:bwMode="auto" r:id="rId5">
+            <p14:nvContentPartPr>
+              <p14:cNvPr id="9" name="Ink 8">
+                <a:extLst>
+                  <a:ext uri="{FF2B5EF4-FFF2-40B4-BE49-F238E27FC236}">
+                    <a16:creationId xmlns:a16="http://schemas.microsoft.com/office/drawing/2014/main" id="{895B8589-CF8A-2B0E-B79C-03F5F041FC97}"/>
+                  </a:ext>
+                </a:extLst>
+              </p14:cNvPr>
+              <p14:cNvContentPartPr/>
+              <p14:nvPr/>
+            </p14:nvContentPartPr>
+            <p14:xfrm>
+              <a:off x="1142574" y="1551373"/>
+              <a:ext cx="270" cy="270"/>
+            </p14:xfrm>
+          </p:contentPart>
+        </mc:Choice>
+        <mc:Fallback xmlns="">
+          <p:pic>
+            <p:nvPicPr>
+              <p:cNvPr id="9" name="Ink 8">
+                <a:extLst>
+                  <a:ext uri="{FF2B5EF4-FFF2-40B4-BE49-F238E27FC236}">
+                    <a16:creationId xmlns:a16="http://schemas.microsoft.com/office/drawing/2014/main" id="{BC90F249-0F8D-8A72-C826-5B5928532520}"/>
+                  </a:ext>
+                </a:extLst>
+              </p:cNvPr>
+              <p:cNvPicPr/>
+              <p:nvPr/>
+            </p:nvPicPr>
+            <p:blipFill>
+              <a:blip r:embed="rId4"/>
+              <a:stretch>
+                <a:fillRect/>
+              </a:stretch>
+            </p:blipFill>
+            <p:spPr>
+              <a:xfrm>
+                <a:off x="1135824" y="1544623"/>
+                <a:ext cx="13500" cy="13500"/>
+              </a:xfrm>
+              <a:prstGeom prst="rect">
+                <a:avLst/>
+              </a:prstGeom>
+            </p:spPr>
+          </p:pic>
+        </mc:Fallback>
+      </mc:AlternateContent>
+      <p:sp>
+        <p:nvSpPr>
+          <p:cNvPr id="12" name="AutoShape 4">
+            <a:extLst>
+              <a:ext uri="{FF2B5EF4-FFF2-40B4-BE49-F238E27FC236}">
+                <a16:creationId xmlns:a16="http://schemas.microsoft.com/office/drawing/2014/main" id="{C0CA2657-7282-DA26-EB5D-991BB9429ACD}"/>
+              </a:ext>
+            </a:extLst>
+          </p:cNvPr>
+          <p:cNvSpPr>
+            <a:spLocks noChangeAspect="1" noChangeArrowheads="1"/>
+          </p:cNvSpPr>
+          <p:nvPr/>
+        </p:nvSpPr>
+        <p:spPr bwMode="auto">
+          <a:xfrm>
+            <a:off x="3239691" y="1325166"/>
+            <a:ext cx="2664619" cy="2493169"/>
+          </a:xfrm>
+          <a:prstGeom prst="rect">
+            <a:avLst/>
+          </a:prstGeom>
+          <a:noFill/>
+          <a:extLst>
+            <a:ext uri="{909E8E84-426E-40DD-AFC4-6F175D3DCCD1}">
+              <a14:hiddenFill xmlns:a14="http://schemas.microsoft.com/office/drawing/2010/main">
+                <a:solidFill>
+                  <a:srgbClr val="FFFFFF"/>
+                </a:solidFill>
+              </a14:hiddenFill>
+            </a:ext>
+          </a:extLst>
+        </p:spPr>
+        <p:txBody>
+          <a:bodyPr vert="horz" wrap="square" lIns="68580" tIns="34290" rIns="68580" bIns="34290" numCol="1" anchor="t" anchorCtr="0" compatLnSpc="1">
+            <a:prstTxWarp prst="textNoShape">
+              <a:avLst/>
+            </a:prstTxWarp>
+          </a:bodyPr>
+          <a:lstStyle/>
+          <a:p>
+            <a:endParaRPr lang="en-US" sz="1050"/>
+          </a:p>
+        </p:txBody>
+      </p:sp>
+      <p:pic>
+        <p:nvPicPr>
+          <p:cNvPr id="5" name="Picture 4">
+            <a:extLst>
+              <a:ext uri="{FF2B5EF4-FFF2-40B4-BE49-F238E27FC236}">
+                <a16:creationId xmlns:a16="http://schemas.microsoft.com/office/drawing/2014/main" id="{7FA3061E-A000-9427-7DFB-24A54F3921DF}"/>
+              </a:ext>
+            </a:extLst>
+          </p:cNvPr>
+          <p:cNvPicPr>
+            <a:picLocks noChangeAspect="1"/>
+          </p:cNvPicPr>
+          <p:nvPr/>
+        </p:nvPicPr>
+        <p:blipFill>
+          <a:blip r:embed="rId6"/>
+          <a:srcRect/>
+          <a:stretch/>
+        </p:blipFill>
+        <p:spPr>
+          <a:xfrm>
+            <a:off x="4210647" y="-24189"/>
+            <a:ext cx="4761465" cy="1397075"/>
+          </a:xfrm>
+          <a:prstGeom prst="rect">
+            <a:avLst/>
+          </a:prstGeom>
+        </p:spPr>
+      </p:pic>
+      <p:sp>
+        <p:nvSpPr>
+          <p:cNvPr id="4" name="Slide Number Placeholder 3">
+            <a:extLst>
+              <a:ext uri="{FF2B5EF4-FFF2-40B4-BE49-F238E27FC236}">
+                <a16:creationId xmlns:a16="http://schemas.microsoft.com/office/drawing/2014/main" id="{566C52A8-E458-0A8C-7E03-A9D3B3AD91E3}"/>
+              </a:ext>
+            </a:extLst>
+          </p:cNvPr>
+          <p:cNvSpPr>
+            <a:spLocks noGrp="1"/>
+          </p:cNvSpPr>
+          <p:nvPr>
+            <p:ph type="sldNum" sz="quarter" idx="4"/>
+          </p:nvPr>
+        </p:nvSpPr>
+        <p:spPr/>
+        <p:txBody>
+          <a:bodyPr/>
+          <a:lstStyle/>
+          <a:p>
+            <a:fld id="{C4204591-24BD-A542-B9D5-F8D8A88D2FEE}" type="slidenum">
+              <a:rPr lang="en-US" smtClean="0"/>
+              <a:pPr/>
+              <a:t>9</a:t>
+            </a:fld>
+            <a:endParaRPr lang="en-US" dirty="0"/>
+          </a:p>
+        </p:txBody>
+      </p:sp>
+    </p:spTree>
+    <p:extLst>
+      <p:ext uri="{BB962C8B-B14F-4D97-AF65-F5344CB8AC3E}">
+        <p14:creationId xmlns:p14="http://schemas.microsoft.com/office/powerpoint/2010/main" val="349922459"/>
       </p:ext>
     </p:extLst>
   </p:cSld>
